--- a/public/fun/pack/pptx/newspro/카드뉴스프리미엄_37_건강·안심습관_시나몬로즈.pptx
+++ b/public/fun/pack/pptx/newspro/카드뉴스프리미엄_37_건강·안심습관_시나몬로즈.pptx
@@ -113,12 +113,12 @@
   <p:extLst>
     <p:ext uri="{521415D9-36F7-43E2-AB2F-B90AF26B5E84}">
       <p14:sectionLst xmlns:p14="http://schemas.microsoft.com/office/powerpoint/2010/main">
-        <p14:section name="시작" id="{FFD2801B-C5AE-4B04-AB13-9769002DC0BC}">
+        <p14:section name="시작" id="{E0D0B7E3-D479-415A-994A-03A8C25FCDC9}">
           <p14:sldIdLst>
             <p14:sldId id="256"/>
           </p14:sldIdLst>
         </p14:section>
-        <p14:section name="본문" id="{3B082425-09BF-4D1C-9F16-4B717F6D2146}">
+        <p14:section name="본문" id="{E405F7D4-D2DB-4417-A4B4-EE2A8019CE04}">
           <p14:sldIdLst>
             <p14:sldId id="257"/>
             <p14:sldId id="258"/>
@@ -127,7 +127,7 @@
             <p14:sldId id="261"/>
           </p14:sldIdLst>
         </p14:section>
-        <p14:section name="마무리" id="{884CFED0-290E-431D-B02E-8494C4B882B6}">
+        <p14:section name="마무리" id="{5E42DB7F-1DAC-4602-8D33-43D142FAC77F}">
           <p14:sldIdLst>
             <p14:sldId id="262"/>
           </p14:sldIdLst>
@@ -1526,7 +1526,7 @@
             </a:lvl1pPr>
           </a:lstStyle>
           <a:p>
-            <a:fld id="{E1850DD0-B2C9-431F-90F3-29EE8B34E747}" type="slidenum">
+            <a:fld id="{F75A6BEF-7E60-4F49-8682-C2C669BFF201}" type="slidenum">
               <a:rPr lang="en-US"/>
               <a:t>‹#›</a:t>
             </a:fld>
@@ -2112,7 +2112,7 @@
             </a:lvl1pPr>
           </a:lstStyle>
           <a:p>
-            <a:fld id="{BEA80A3C-B006-4E6D-8E4A-955BFC72DC8D}" type="slidenum">
+            <a:fld id="{3BC2CC09-378D-4628-AAD0-A7510E45F7D2}" type="slidenum">
               <a:rPr lang="en-US"/>
               <a:t>‹#›</a:t>
             </a:fld>
@@ -2701,7 +2701,7 @@
             </a:lvl1pPr>
           </a:lstStyle>
           <a:p>
-            <a:fld id="{E4F88980-6FDB-4B26-B129-C9230631CF12}" type="slidenum">
+            <a:fld id="{541B5599-F2BA-408B-9359-427DC15A4D22}" type="slidenum">
               <a:rPr lang="en-US"/>
               <a:t>‹#›</a:t>
             </a:fld>
@@ -3482,7 +3482,7 @@
           <a:p>
             <a:r>
               <a:rPr lang="ko-KR"/>
-              <a:t>가을 건강검진 챙기는 순서</a:t>
+              <a:t>건강검진 챙기는 순서</a:t>
             </a:r>
           </a:p>
         </p:txBody>
@@ -3611,7 +3611,7 @@
           <a:bodyPr/>
           <a:lstStyle/>
           <a:p>
-            <a:fld id="{2BE9B773-FF0C-4FFB-B77E-F6F39FA70FB6}" type="slidenum">
+            <a:fld id="{03986E83-243F-49A1-A53C-2780AF9A817B}" type="slidenum">
               <a:rPr lang="en-US"/>
               <a:t>‹#›</a:t>
             </a:fld>
@@ -3777,7 +3777,7 @@
           <a:bodyPr/>
           <a:lstStyle/>
           <a:p>
-            <a:fld id="{9FAEC9EE-9C9E-4FF3-84DE-98F3F512E682}" type="slidenum">
+            <a:fld id="{8A23DEFA-837C-4DF5-BC39-92D68B0C90CF}" type="slidenum">
               <a:rPr lang="en-US"/>
               <a:t>‹#›</a:t>
             </a:fld>
@@ -3943,7 +3943,7 @@
           <a:bodyPr/>
           <a:lstStyle/>
           <a:p>
-            <a:fld id="{1F48283A-6B63-426C-860C-696FC2309DC3}" type="slidenum">
+            <a:fld id="{AAC0B2E2-BCAD-4DFE-9314-C5A5BE99C67C}" type="slidenum">
               <a:rPr lang="en-US"/>
               <a:t>‹#›</a:t>
             </a:fld>
@@ -4109,7 +4109,7 @@
           <a:bodyPr/>
           <a:lstStyle/>
           <a:p>
-            <a:fld id="{7F1DC9FC-E803-4813-9E87-A6E9C4E51ADC}" type="slidenum">
+            <a:fld id="{0F1597B7-F249-4187-AED8-95A88AF02C9E}" type="slidenum">
               <a:rPr lang="en-US"/>
               <a:t>‹#›</a:t>
             </a:fld>
@@ -4275,7 +4275,7 @@
           <a:bodyPr/>
           <a:lstStyle/>
           <a:p>
-            <a:fld id="{2F3E29EC-443B-4A48-BC61-53B91E8A0EB7}" type="slidenum">
+            <a:fld id="{4114A771-3EE2-4D89-9A82-6F2A534F4521}" type="slidenum">
               <a:rPr lang="en-US"/>
               <a:t>‹#›</a:t>
             </a:fld>
